--- a/decks/MatterForge_Lukoil.pptx
+++ b/decks/MatterForge_Lukoil.pptx
@@ -3379,7 +3379,7 @@
             <a:r>
               <a:rPr lang="en-US" sz="900" dirty="0">
                 <a:solidFill>
-                  <a:srgbClr val="6B6B6B"/>
+                  <a:srgbClr val="9DB0B8"/>
                 </a:solidFill>
                 <a:latin typeface="Calibri" pitchFamily="34" charset="0"/>
                 <a:ea typeface="Calibri" pitchFamily="34" charset="-122"/>
@@ -3456,7 +3456,7 @@
                 <a:ea typeface="Cambria" pitchFamily="34" charset="-122"/>
                 <a:cs typeface="Cambria" pitchFamily="34" charset="-120"/>
               </a:rPr>
-              <a:t>Дорожная карта 24 месяцев и что нам нужно от вас</a:t>
+              <a:t>Дорожная карта и данные от вас</a:t>
             </a:r>
             <a:endParaRPr lang="en-US" sz="3000" dirty="0"/>
           </a:p>
@@ -5062,7 +5062,7 @@
                 <a:ea typeface="Cambria" pitchFamily="34" charset="-122"/>
                 <a:cs typeface="Cambria" pitchFamily="34" charset="-120"/>
               </a:rPr>
-              <a:t>Резюме: три предложения, просчитанные до денег</a:t>
+              <a:t>Резюме: три предложения в деньгах</a:t>
             </a:r>
             <a:endParaRPr lang="en-US" sz="3000" dirty="0"/>
           </a:p>
@@ -7339,7 +7339,7 @@
                 <a:ea typeface="Cambria" pitchFamily="34" charset="-122"/>
                 <a:cs typeface="Cambria" pitchFamily="34" charset="-120"/>
               </a:rPr>
-              <a:t>L1 · ПАО-флот: базовые масла из факельного газа</a:t>
+              <a:t>L1 · ПАО из факельного ПНГ</a:t>
             </a:r>
             <a:endParaRPr lang="en-US" sz="3000" dirty="0"/>
           </a:p>
@@ -8904,7 +8904,7 @@
                 <a:ea typeface="Cambria" pitchFamily="34" charset="-122"/>
                 <a:cs typeface="Cambria" pitchFamily="34" charset="-120"/>
               </a:rPr>
-              <a:t>L3 · Бирюзовый водород на НПЗ: пиролиз вместо SMR</a:t>
+              <a:t>L3 · Водород НПЗ: пиролиз вместо SMR</a:t>
             </a:r>
             <a:endParaRPr lang="en-US" sz="3000" dirty="0"/>
           </a:p>

--- a/decks/MatterForge_Lukoil.pptx
+++ b/decks/MatterForge_Lukoil.pptx
@@ -5533,7 +5533,7 @@
                 <a:ea typeface="Calibri" pitchFamily="34" charset="-122"/>
                 <a:cs typeface="Calibri" pitchFamily="34" charset="-120"/>
               </a:rPr>
-              <a:t>Экономия против SMR; окупаемость 2.5 года; NPV +$217M; −475 кт CO₂/год</a:t>
+              <a:t>Экономия против SMR; окупаемость 2.5 года; NPV +$254M; −475 кт CO₂/год</a:t>
             </a:r>
             <a:endParaRPr lang="en-US" sz="1050" dirty="0"/>
           </a:p>
@@ -5627,7 +5627,7 @@
                 <a:ea typeface="Calibri" pitchFamily="34" charset="-122"/>
                 <a:cs typeface="Calibri" pitchFamily="34" charset="-120"/>
               </a:rPr>
-              <a:t>Пессимистичные сценарии посчитаны и показаны: L2 остаётся жив, L1 жив на факеле, L3 в пессимизме мёртв (NPV −$125M) — и мы говорим это прямо</a:t>
+              <a:t>Пессимистичные сценарии посчитаны и показаны: L2 остаётся жив, L1 жив на факеле, L3 в пессимизме мёртв (NPV&lt;0) — и мы говорим это прямо</a:t>
             </a:r>
             <a:endParaRPr lang="en-US" sz="1350" dirty="0"/>
           </a:p>
@@ -9029,7 +9029,7 @@
                 <a:ea typeface="Calibri" pitchFamily="34" charset="-122"/>
                 <a:cs typeface="Calibri" pitchFamily="34" charset="-120"/>
               </a:rPr>
-              <a:t>Экономия $59M/год против SMR ($1.4/кг + CO₂ $20/т); капекс $148M; окупаемость 2.5 года; NPV +$217M</a:t>
+              <a:t>Экономия $59M/год против SMR ($1.4/кг + CO₂ $20/т); капекс $148M; окупаемость 2.5 года; NPV +$254M</a:t>
             </a:r>
             <a:endParaRPr lang="en-US" sz="1250" dirty="0"/>
           </a:p>
@@ -9101,7 +9101,7 @@
                 <a:ea typeface="Calibri" pitchFamily="34" charset="-122"/>
                 <a:cs typeface="Calibri" pitchFamily="34" charset="-120"/>
               </a:rPr>
-              <a:t>Оптимизм (НПЗ 100 кт, газ $100): экономия $266M/год, NPV $1.46B</a:t>
+              <a:t>Оптимизм (НПЗ 100 кт, газ $100): экономия $266M/год, NPV $1.63B</a:t>
             </a:r>
             <a:endParaRPr lang="en-US" sz="1250" dirty="0"/>
           </a:p>
